--- a/data-eng/decks/w2d3s1.pptx
+++ b/data-eng/decks/w2d3s1.pptx
@@ -5444,7 +5444,7 @@
                 <a:ea typeface="Pretendard"/>
                 <a:cs typeface="Pretendard"/>
               </a:rPr>
-              <a:t>Docker Desktop 실행·터미널 열기</a:t>
+              <a:t>실습점검 메뉴 — 27017·이미지·가상환경</a:t>
             </a:r>
           </a:p>
         </p:txBody>
@@ -13498,7 +13498,7 @@
                 <a:ea typeface="Pretendard"/>
                 <a:cs typeface="Pretendard"/>
               </a:rPr>
-              <a:t>이번 과정도 로그 원본은 MongoDB, 정제 결과는 4주차 Iceberg 표, 분석은 5주차 Spark — 도구마다 잘하는 자리가 다르다</a:t>
+              <a:t>흔한 조합: 원본은 문서 DB 에 그대로, 정제 결과는 표로 — 이번 과정도 4주차 Iceberg·5주차 Spark 로 정제·분석을 이어 간다</a:t>
             </a:r>
           </a:p>
         </p:txBody>
